--- a/IPot.pptx
+++ b/IPot.pptx
@@ -45,11 +45,13 @@
     <p:sldId id="278" r:id="rId40"/>
     <p:sldId id="279" r:id="rId41"/>
     <p:sldId id="301" r:id="rId42"/>
+    <p:sldId id="303" r:id="rId43"/>
+    <p:sldId id="302" r:id="rId44"/>
   </p:sldIdLst>
   <p:sldSz cx="12192000" cy="6858000"/>
   <p:notesSz cx="6858000" cy="9144000"/>
   <p:custDataLst>
-    <p:tags r:id="rId46"/>
+    <p:tags r:id="rId48"/>
   </p:custDataLst>
   <p:defaultTextStyle>
     <a:defPPr>
@@ -154,7 +156,7 @@
             <a:srgbClr val="A4A3A4"/>
           </p15:clr>
         </p15:guide>
-        <p15:guide id="2" pos="3860" userDrawn="1">
+        <p15:guide id="2" pos="3878" userDrawn="1">
           <p15:clr>
             <a:srgbClr val="A4A3A4"/>
           </p15:clr>
@@ -13793,7 +13795,7 @@
         <p:spPr>
           <a:xfrm>
             <a:off x="218440" y="166370"/>
-            <a:ext cx="4064000" cy="368300"/>
+            <a:ext cx="11790680" cy="368300"/>
           </a:xfrm>
           <a:prstGeom prst="rect">
             <a:avLst/>
@@ -13819,13 +13821,25 @@
             </a:r>
             <a:r>
               <a:rPr lang="zh-CN" altLang="en-US"/>
-              <a:t>补充</a:t>
+              <a:t>创建</a:t>
             </a:r>
             <a:r>
               <a:rPr lang="en-US" altLang="zh-CN"/>
               <a:t>)</a:t>
             </a:r>
-            <a:endParaRPr lang="en-US" altLang="zh-CN"/>
+            <a:r>
+              <a:rPr lang="zh-CN" altLang="en-US"/>
+              <a:t>（</a:t>
+            </a:r>
+            <a:r>
+              <a:rPr lang="en-US" altLang="zh-CN"/>
+              <a:t>2026.7.21</a:t>
+            </a:r>
+            <a:r>
+              <a:rPr lang="zh-CN" altLang="en-US"/>
+              <a:t>补充）</a:t>
+            </a:r>
+            <a:endParaRPr lang="zh-CN" altLang="en-US"/>
           </a:p>
         </p:txBody>
       </p:sp>
@@ -24232,24 +24246,251 @@
           </a:p>
         </p:txBody>
       </p:sp>
+      <p:grpSp>
+        <p:nvGrpSpPr>
+          <p:cNvPr id="12" name="组合 11"/>
+          <p:cNvGrpSpPr/>
+          <p:nvPr/>
+        </p:nvGrpSpPr>
+        <p:grpSpPr>
+          <a:xfrm>
+            <a:off x="177800" y="2548255"/>
+            <a:ext cx="5657850" cy="1845310"/>
+            <a:chOff x="390" y="2221"/>
+            <a:chExt cx="8910" cy="2906"/>
+          </a:xfrm>
+        </p:grpSpPr>
+        <p:pic>
+          <p:nvPicPr>
+            <p:cNvPr id="2" name="图片 1"/>
+            <p:cNvPicPr>
+              <a:picLocks noChangeAspect="1"/>
+            </p:cNvPicPr>
+            <p:nvPr/>
+          </p:nvPicPr>
+          <p:blipFill>
+            <a:blip r:embed="rId1"/>
+            <a:stretch>
+              <a:fillRect/>
+            </a:stretch>
+          </p:blipFill>
+          <p:spPr>
+            <a:xfrm>
+              <a:off x="390" y="2221"/>
+              <a:ext cx="8911" cy="2907"/>
+            </a:xfrm>
+            <a:prstGeom prst="rect">
+              <a:avLst/>
+            </a:prstGeom>
+          </p:spPr>
+        </p:pic>
+        <p:sp>
+          <p:nvSpPr>
+            <p:cNvPr id="3" name="文本框 2"/>
+            <p:cNvSpPr txBox="1"/>
+            <p:nvPr/>
+          </p:nvSpPr>
+          <p:spPr>
+            <a:xfrm>
+              <a:off x="4112" y="2400"/>
+              <a:ext cx="3110" cy="628"/>
+            </a:xfrm>
+            <a:prstGeom prst="rect">
+              <a:avLst/>
+            </a:prstGeom>
+            <a:noFill/>
+          </p:spPr>
+          <p:txBody>
+            <a:bodyPr wrap="square" rtlCol="0">
+              <a:spAutoFit/>
+            </a:bodyPr>
+            <a:p>
+              <a:r>
+                <a:rPr lang="zh-CN" altLang="en-US" sz="1000">
+                  <a:solidFill>
+                    <a:srgbClr val="FF0000"/>
+                  </a:solidFill>
+                </a:rPr>
+                <a:t>源代码收集到的标志位为</a:t>
+              </a:r>
+              <a:r>
+                <a:rPr lang="en-US" altLang="zh-CN" sz="1000">
+                  <a:solidFill>
+                    <a:srgbClr val="FF0000"/>
+                  </a:solidFill>
+                </a:rPr>
+                <a:t>0111</a:t>
+              </a:r>
+              <a:r>
+                <a:rPr lang="zh-CN" altLang="en-US" sz="1000">
+                  <a:solidFill>
+                    <a:srgbClr val="FF0000"/>
+                  </a:solidFill>
+                </a:rPr>
+                <a:t>时才能</a:t>
+              </a:r>
+              <a:r>
+                <a:rPr lang="zh-CN" altLang="en-US" sz="1000">
+                  <a:solidFill>
+                    <a:srgbClr val="FF0000"/>
+                  </a:solidFill>
+                </a:rPr>
+                <a:t>发送</a:t>
+              </a:r>
+              <a:endParaRPr lang="zh-CN" altLang="en-US" sz="1000">
+                <a:solidFill>
+                  <a:srgbClr val="FF0000"/>
+                </a:solidFill>
+              </a:endParaRPr>
+            </a:p>
+          </p:txBody>
+        </p:sp>
+      </p:grpSp>
+      <p:cxnSp>
+        <p:nvCxnSpPr>
+          <p:cNvPr id="5" name="直接连接符 4"/>
+          <p:cNvCxnSpPr/>
+          <p:nvPr/>
+        </p:nvCxnSpPr>
+        <p:spPr>
+          <a:xfrm>
+            <a:off x="5906135" y="1410335"/>
+            <a:ext cx="0" cy="5412740"/>
+          </a:xfrm>
+          <a:prstGeom prst="line">
+            <a:avLst/>
+          </a:prstGeom>
+          <a:ln w="12700" cap="flat" cmpd="sng" algn="ctr">
+            <a:solidFill>
+              <a:schemeClr val="accent1"/>
+            </a:solidFill>
+            <a:prstDash val="dash"/>
+            <a:miter lim="800000"/>
+          </a:ln>
+        </p:spPr>
+        <p:style>
+          <a:lnRef idx="0">
+            <a:schemeClr val="accent1"/>
+          </a:lnRef>
+          <a:fillRef idx="0">
+            <a:srgbClr val="FFFFFF"/>
+          </a:fillRef>
+          <a:effectRef idx="0">
+            <a:srgbClr val="FFFFFF"/>
+          </a:effectRef>
+          <a:fontRef idx="minor">
+            <a:schemeClr val="tx1"/>
+          </a:fontRef>
+        </p:style>
+      </p:cxnSp>
+      <p:sp>
+        <p:nvSpPr>
+          <p:cNvPr id="6" name="矩形 5"/>
+          <p:cNvSpPr/>
+          <p:nvPr/>
+        </p:nvSpPr>
+        <p:spPr>
+          <a:xfrm>
+            <a:off x="6171565" y="1524000"/>
+            <a:ext cx="5801360" cy="626745"/>
+          </a:xfrm>
+          <a:prstGeom prst="rect">
+            <a:avLst/>
+          </a:prstGeom>
+          <a:ln>
+            <a:solidFill>
+              <a:srgbClr val="FF0000"/>
+            </a:solidFill>
+          </a:ln>
+        </p:spPr>
+        <p:style>
+          <a:lnRef idx="2">
+            <a:schemeClr val="accent1"/>
+          </a:lnRef>
+          <a:fillRef idx="0">
+            <a:srgbClr val="FFFFFF"/>
+          </a:fillRef>
+          <a:effectRef idx="0">
+            <a:srgbClr val="FFFFFF"/>
+          </a:effectRef>
+          <a:fontRef idx="minor">
+            <a:schemeClr val="tx1"/>
+          </a:fontRef>
+        </p:style>
+        <p:txBody>
+          <a:bodyPr rtlCol="0" anchor="ctr"/>
+          <a:p>
+            <a:pPr algn="ctr"/>
+            <a:r>
+              <a:rPr lang="en-US" altLang="zh-CN" sz="1400"/>
+              <a:t>1</a:t>
+            </a:r>
+            <a:r>
+              <a:rPr lang="zh-CN" altLang="en-US" sz="1400"/>
+              <a:t>、创建软件定时器（同时开启回调函数</a:t>
+            </a:r>
+            <a:r>
+              <a:rPr lang="en-US" altLang="zh-CN" sz="1400" u="sng">
+                <a:highlight>
+                  <a:srgbClr val="FFFF00"/>
+                </a:highlight>
+              </a:rPr>
+              <a:t>vDataWatchdogCallback</a:t>
+            </a:r>
+            <a:r>
+              <a:rPr lang="zh-CN" altLang="en-US" sz="1400"/>
+              <a:t>）</a:t>
+            </a:r>
+            <a:endParaRPr lang="zh-CN" altLang="en-US" sz="1400"/>
+          </a:p>
+          <a:p>
+            <a:pPr algn="ctr"/>
+            <a:r>
+              <a:rPr lang="zh-CN" altLang="en-US" sz="1400"/>
+              <a:t>【参数设置：软件定时长度</a:t>
+            </a:r>
+            <a:r>
+              <a:rPr lang="en-US" altLang="zh-CN" sz="1400"/>
+              <a:t>5000TICKS</a:t>
+            </a:r>
+            <a:r>
+              <a:rPr lang="zh-CN" altLang="en-US" sz="1400"/>
+              <a:t>（</a:t>
+            </a:r>
+            <a:r>
+              <a:rPr lang="en-US" altLang="zh-CN" sz="1400"/>
+              <a:t>5s</a:t>
+            </a:r>
+            <a:r>
+              <a:rPr lang="zh-CN" altLang="en-US" sz="1400"/>
+              <a:t>），不自动</a:t>
+            </a:r>
+            <a:r>
+              <a:rPr lang="zh-CN" altLang="en-US" sz="1400"/>
+              <a:t>重载】</a:t>
+            </a:r>
+            <a:endParaRPr lang="zh-CN" altLang="en-US" sz="1400"/>
+          </a:p>
+        </p:txBody>
+      </p:sp>
       <p:pic>
         <p:nvPicPr>
-          <p:cNvPr id="2" name="图片 1"/>
+          <p:cNvPr id="7" name="图片 6"/>
           <p:cNvPicPr>
             <a:picLocks noChangeAspect="1"/>
           </p:cNvPicPr>
           <p:nvPr/>
         </p:nvPicPr>
         <p:blipFill>
-          <a:blip r:embed="rId1"/>
+          <a:blip r:embed="rId2"/>
           <a:stretch>
             <a:fillRect/>
           </a:stretch>
         </p:blipFill>
         <p:spPr>
           <a:xfrm>
-            <a:off x="247650" y="1410335"/>
-            <a:ext cx="5658485" cy="1845945"/>
+            <a:off x="6084570" y="2212340"/>
+            <a:ext cx="5887720" cy="335915"/>
           </a:xfrm>
           <a:prstGeom prst="rect">
             <a:avLst/>
@@ -24258,68 +24499,175 @@
       </p:pic>
       <p:sp>
         <p:nvSpPr>
-          <p:cNvPr id="3" name="文本框 2"/>
-          <p:cNvSpPr txBox="1"/>
+          <p:cNvPr id="8" name="矩形 7"/>
+          <p:cNvSpPr/>
           <p:nvPr/>
         </p:nvSpPr>
         <p:spPr>
           <a:xfrm>
-            <a:off x="2611120" y="1524000"/>
-            <a:ext cx="1974850" cy="398780"/>
+            <a:off x="6171565" y="2548255"/>
+            <a:ext cx="5801360" cy="575310"/>
           </a:xfrm>
           <a:prstGeom prst="rect">
             <a:avLst/>
           </a:prstGeom>
-          <a:noFill/>
+          <a:ln>
+            <a:solidFill>
+              <a:srgbClr val="FF0000"/>
+            </a:solidFill>
+          </a:ln>
         </p:spPr>
+        <p:style>
+          <a:lnRef idx="2">
+            <a:schemeClr val="accent1"/>
+          </a:lnRef>
+          <a:fillRef idx="0">
+            <a:srgbClr val="FFFFFF"/>
+          </a:fillRef>
+          <a:effectRef idx="0">
+            <a:srgbClr val="FFFFFF"/>
+          </a:effectRef>
+          <a:fontRef idx="minor">
+            <a:schemeClr val="tx1"/>
+          </a:fontRef>
+        </p:style>
         <p:txBody>
-          <a:bodyPr wrap="square" rtlCol="0">
-            <a:spAutoFit/>
-          </a:bodyPr>
-          <a:p>
-            <a:r>
-              <a:rPr lang="zh-CN" altLang="en-US" sz="1000">
-                <a:solidFill>
-                  <a:srgbClr val="FF0000"/>
-                </a:solidFill>
-              </a:rPr>
-              <a:t>源代码收集到的标志位为</a:t>
-            </a:r>
-            <a:r>
-              <a:rPr lang="en-US" altLang="zh-CN" sz="1000">
-                <a:solidFill>
-                  <a:srgbClr val="FF0000"/>
-                </a:solidFill>
-              </a:rPr>
-              <a:t>0111</a:t>
-            </a:r>
-            <a:r>
-              <a:rPr lang="zh-CN" altLang="en-US" sz="1000">
-                <a:solidFill>
-                  <a:srgbClr val="FF0000"/>
-                </a:solidFill>
-              </a:rPr>
-              <a:t>时才能</a:t>
-            </a:r>
-            <a:r>
-              <a:rPr lang="zh-CN" altLang="en-US" sz="1000">
-                <a:solidFill>
-                  <a:srgbClr val="FF0000"/>
-                </a:solidFill>
-              </a:rPr>
-              <a:t>发送</a:t>
-            </a:r>
-            <a:endParaRPr lang="zh-CN" altLang="en-US" sz="1000">
-              <a:solidFill>
-                <a:srgbClr val="FF0000"/>
-              </a:solidFill>
-            </a:endParaRPr>
+          <a:bodyPr rtlCol="0" anchor="ctr"/>
+          <a:p>
+            <a:pPr algn="ctr"/>
+            <a:r>
+              <a:rPr lang="en-US" altLang="zh-CN" sz="1400"/>
+              <a:t>2</a:t>
+            </a:r>
+            <a:r>
+              <a:rPr lang="zh-CN" altLang="en-US" sz="1400"/>
+              <a:t>、回调函数（回调函数里禁止写入有阻塞行为的</a:t>
+            </a:r>
+            <a:r>
+              <a:rPr lang="zh-CN" altLang="en-US" sz="1400"/>
+              <a:t>操作）</a:t>
+            </a:r>
+            <a:endParaRPr lang="zh-CN" altLang="en-US" sz="1400"/>
+          </a:p>
+          <a:p>
+            <a:pPr algn="ctr"/>
+            <a:r>
+              <a:rPr lang="zh-CN" altLang="en-US" sz="1400"/>
+              <a:t>【使用队列传输的方式给出信号指令，后续操作交给其他程序</a:t>
+            </a:r>
+            <a:r>
+              <a:rPr lang="zh-CN" altLang="en-US" sz="1400"/>
+              <a:t>完成】</a:t>
+            </a:r>
+            <a:endParaRPr lang="zh-CN" altLang="en-US" sz="1400"/>
           </a:p>
         </p:txBody>
       </p:sp>
+      <p:pic>
+        <p:nvPicPr>
+          <p:cNvPr id="9" name="图片 8"/>
+          <p:cNvPicPr>
+            <a:picLocks noChangeAspect="1"/>
+          </p:cNvPicPr>
+          <p:nvPr/>
+        </p:nvPicPr>
+        <p:blipFill>
+          <a:blip r:embed="rId3"/>
+          <a:stretch>
+            <a:fillRect/>
+          </a:stretch>
+        </p:blipFill>
+        <p:spPr>
+          <a:xfrm>
+            <a:off x="7097395" y="3197225"/>
+            <a:ext cx="3949700" cy="1014730"/>
+          </a:xfrm>
+          <a:prstGeom prst="rect">
+            <a:avLst/>
+          </a:prstGeom>
+        </p:spPr>
+      </p:pic>
+      <p:sp>
+        <p:nvSpPr>
+          <p:cNvPr id="10" name="矩形 9"/>
+          <p:cNvSpPr/>
+          <p:nvPr/>
+        </p:nvSpPr>
+        <p:spPr>
+          <a:xfrm>
+            <a:off x="6170930" y="4261485"/>
+            <a:ext cx="5801360" cy="936625"/>
+          </a:xfrm>
+          <a:prstGeom prst="rect">
+            <a:avLst/>
+          </a:prstGeom>
+          <a:ln>
+            <a:solidFill>
+              <a:srgbClr val="FF0000"/>
+            </a:solidFill>
+          </a:ln>
+        </p:spPr>
+        <p:style>
+          <a:lnRef idx="2">
+            <a:schemeClr val="accent1"/>
+          </a:lnRef>
+          <a:fillRef idx="0">
+            <a:srgbClr val="FFFFFF"/>
+          </a:fillRef>
+          <a:effectRef idx="0">
+            <a:srgbClr val="FFFFFF"/>
+          </a:effectRef>
+          <a:fontRef idx="minor">
+            <a:schemeClr val="tx1"/>
+          </a:fontRef>
+        </p:style>
+        <p:txBody>
+          <a:bodyPr rtlCol="0" anchor="ctr"/>
+          <a:p>
+            <a:pPr algn="ctr"/>
+            <a:r>
+              <a:rPr lang="en-US" altLang="zh-CN" sz="1400"/>
+              <a:t>3</a:t>
+            </a:r>
+            <a:r>
+              <a:rPr lang="zh-CN" altLang="en-US" sz="1400"/>
+              <a:t>、在每一次获取到新的一组数据的开始开启定时器，若在定时器结束时间范围内成功传输所有数据，则关闭定时器，等待下一组数据的开始。若在定时器结束后仍未传输数据，进入回调函数，发送队列信息，强制所有数据</a:t>
+            </a:r>
+            <a:r>
+              <a:rPr lang="zh-CN" altLang="en-US" sz="1400"/>
+              <a:t>发送</a:t>
+            </a:r>
+            <a:endParaRPr lang="zh-CN" altLang="en-US" sz="1400"/>
+          </a:p>
+        </p:txBody>
+      </p:sp>
+      <p:pic>
+        <p:nvPicPr>
+          <p:cNvPr id="11" name="图片 10"/>
+          <p:cNvPicPr>
+            <a:picLocks noChangeAspect="1"/>
+          </p:cNvPicPr>
+          <p:nvPr/>
+        </p:nvPicPr>
+        <p:blipFill>
+          <a:blip r:embed="rId4"/>
+          <a:stretch>
+            <a:fillRect/>
+          </a:stretch>
+        </p:blipFill>
+        <p:spPr>
+          <a:xfrm>
+            <a:off x="7371080" y="5280660"/>
+            <a:ext cx="3314065" cy="1548765"/>
+          </a:xfrm>
+          <a:prstGeom prst="rect">
+            <a:avLst/>
+          </a:prstGeom>
+        </p:spPr>
+      </p:pic>
     </p:spTree>
     <p:custDataLst>
-      <p:tags r:id="rId2"/>
+      <p:tags r:id="rId5"/>
     </p:custDataLst>
   </p:cSld>
   <p:clrMapOvr>
@@ -24956,6 +25304,969 @@
     </p:spTree>
     <p:custDataLst>
       <p:tags r:id="rId3"/>
+    </p:custDataLst>
+  </p:cSld>
+  <p:clrMapOvr>
+    <a:masterClrMapping/>
+  </p:clrMapOvr>
+</p:sld>
+</file>
+
+<file path=ppt/slides/slide40.xml><?xml version="1.0" encoding="utf-8"?>
+<p:sld xmlns:a="http://schemas.openxmlformats.org/drawingml/2006/main" xmlns:r="http://schemas.openxmlformats.org/officeDocument/2006/relationships" xmlns:p="http://schemas.openxmlformats.org/presentationml/2006/main">
+  <p:cSld>
+    <p:spTree>
+      <p:nvGrpSpPr>
+        <p:cNvPr id="1" name=""/>
+        <p:cNvGrpSpPr/>
+        <p:nvPr/>
+      </p:nvGrpSpPr>
+      <p:grpSpPr/>
+      <p:sp>
+        <p:nvSpPr>
+          <p:cNvPr id="4" name="文本框 3"/>
+          <p:cNvSpPr txBox="1"/>
+          <p:nvPr/>
+        </p:nvSpPr>
+        <p:spPr>
+          <a:xfrm>
+            <a:off x="364490" y="211455"/>
+            <a:ext cx="11659235" cy="1198880"/>
+          </a:xfrm>
+          <a:prstGeom prst="rect">
+            <a:avLst/>
+          </a:prstGeom>
+          <a:noFill/>
+        </p:spPr>
+        <p:txBody>
+          <a:bodyPr wrap="square" rtlCol="0">
+            <a:spAutoFit/>
+          </a:bodyPr>
+          <a:p>
+            <a:r>
+              <a:rPr lang="zh-CN" altLang="en-US"/>
+              <a:t>遇到的问题：（更新于</a:t>
+            </a:r>
+            <a:r>
+              <a:rPr lang="en-US" altLang="zh-CN"/>
+              <a:t>2026.07.22)</a:t>
+            </a:r>
+            <a:endParaRPr lang="zh-CN" altLang="en-US"/>
+          </a:p>
+          <a:p>
+            <a:r>
+              <a:rPr lang="en-US" altLang="zh-CN">
+                <a:solidFill>
+                  <a:srgbClr val="FF0000"/>
+                </a:solidFill>
+              </a:rPr>
+              <a:t>8</a:t>
+            </a:r>
+            <a:r>
+              <a:rPr lang="zh-CN" altLang="en-US">
+                <a:solidFill>
+                  <a:srgbClr val="FF0000"/>
+                </a:solidFill>
+              </a:rPr>
+              <a:t>、单片机控制小灯亮灭没有问题，但是单片机控制水泵开关有概率造成屏幕卡死以及</a:t>
+            </a:r>
+            <a:r>
+              <a:rPr lang="en-US" altLang="zh-CN">
+                <a:solidFill>
+                  <a:srgbClr val="FF0000"/>
+                </a:solidFill>
+              </a:rPr>
+              <a:t>ESP8266</a:t>
+            </a:r>
+            <a:r>
+              <a:rPr lang="zh-CN" altLang="en-US">
+                <a:solidFill>
+                  <a:srgbClr val="FF0000"/>
+                </a:solidFill>
+              </a:rPr>
+              <a:t>掉线的问题</a:t>
+            </a:r>
+            <a:endParaRPr lang="zh-CN" altLang="en-US"/>
+          </a:p>
+          <a:p>
+            <a:r>
+              <a:rPr lang="zh-CN" altLang="en-US">
+                <a:solidFill>
+                  <a:srgbClr val="92D050"/>
+                </a:solidFill>
+              </a:rPr>
+              <a:t>解决方案：该问题的原因是电磁干扰与电源瞬态拉低，可采取的方法是将关于水泵有关的所有电路进行隔离，电源单独使用，地线也单独使用，从而避免影响单片机的正常</a:t>
+            </a:r>
+            <a:r>
+              <a:rPr lang="zh-CN" altLang="en-US">
+                <a:solidFill>
+                  <a:srgbClr val="92D050"/>
+                </a:solidFill>
+              </a:rPr>
+              <a:t>工作</a:t>
+            </a:r>
+            <a:endParaRPr lang="zh-CN" altLang="en-US">
+              <a:solidFill>
+                <a:srgbClr val="92D050"/>
+              </a:solidFill>
+            </a:endParaRPr>
+          </a:p>
+        </p:txBody>
+      </p:sp>
+      <p:sp>
+        <p:nvSpPr>
+          <p:cNvPr id="13" name="文本框 12"/>
+          <p:cNvSpPr txBox="1"/>
+          <p:nvPr/>
+        </p:nvSpPr>
+        <p:spPr>
+          <a:xfrm>
+            <a:off x="364490" y="1410335"/>
+            <a:ext cx="11548110" cy="1753235"/>
+          </a:xfrm>
+          <a:prstGeom prst="rect">
+            <a:avLst/>
+          </a:prstGeom>
+          <a:noFill/>
+        </p:spPr>
+        <p:txBody>
+          <a:bodyPr wrap="square" rtlCol="0">
+            <a:spAutoFit/>
+          </a:bodyPr>
+          <a:p>
+            <a:pPr marL="285750" indent="-285750">
+              <a:buFont typeface="Arial" panose="020B0604020202020204" pitchFamily="34" charset="0"/>
+              <a:buChar char="•"/>
+            </a:pPr>
+            <a:r>
+              <a:rPr lang="zh-CN" altLang="en-US">
+                <a:solidFill>
+                  <a:schemeClr val="tx1"/>
+                </a:solidFill>
+                <a:sym typeface="+mn-ea"/>
+              </a:rPr>
+              <a:t>控制</a:t>
+            </a:r>
+            <a:r>
+              <a:rPr lang="en-US" altLang="zh-CN">
+                <a:solidFill>
+                  <a:schemeClr val="tx1"/>
+                </a:solidFill>
+                <a:sym typeface="+mn-ea"/>
+              </a:rPr>
+              <a:t>LED</a:t>
+            </a:r>
+            <a:r>
+              <a:rPr lang="zh-CN" altLang="en-US">
+                <a:solidFill>
+                  <a:schemeClr val="tx1"/>
+                </a:solidFill>
+                <a:sym typeface="+mn-ea"/>
+              </a:rPr>
+              <a:t>时，</a:t>
+            </a:r>
+            <a:r>
+              <a:rPr lang="en-US" altLang="zh-CN">
+                <a:solidFill>
+                  <a:schemeClr val="tx1"/>
+                </a:solidFill>
+                <a:sym typeface="+mn-ea"/>
+              </a:rPr>
+              <a:t>LED</a:t>
+            </a:r>
+            <a:r>
+              <a:rPr lang="zh-CN" altLang="en-US">
+                <a:solidFill>
+                  <a:schemeClr val="tx1"/>
+                </a:solidFill>
+                <a:sym typeface="+mn-ea"/>
+              </a:rPr>
+              <a:t>属于纯电阻负载，开</a:t>
+            </a:r>
+            <a:r>
+              <a:rPr lang="zh-CN" altLang="en-US">
+                <a:solidFill>
+                  <a:schemeClr val="tx1"/>
+                </a:solidFill>
+                <a:sym typeface="+mn-ea"/>
+              </a:rPr>
+              <a:t>与关其电流变化</a:t>
+            </a:r>
+            <a:r>
+              <a:rPr lang="zh-CN" altLang="en-US">
+                <a:solidFill>
+                  <a:schemeClr val="tx1"/>
+                </a:solidFill>
+                <a:sym typeface="+mn-ea"/>
+              </a:rPr>
+              <a:t>不大</a:t>
+            </a:r>
+            <a:endParaRPr lang="zh-CN" altLang="en-US">
+              <a:solidFill>
+                <a:schemeClr val="tx1"/>
+              </a:solidFill>
+              <a:sym typeface="+mn-ea"/>
+            </a:endParaRPr>
+          </a:p>
+          <a:p>
+            <a:pPr marL="285750" indent="-285750">
+              <a:buFont typeface="Arial" panose="020B0604020202020204" pitchFamily="34" charset="0"/>
+              <a:buChar char="•"/>
+            </a:pPr>
+            <a:r>
+              <a:rPr lang="zh-CN" altLang="en-US">
+                <a:solidFill>
+                  <a:schemeClr val="tx1"/>
+                </a:solidFill>
+                <a:sym typeface="+mn-ea"/>
+              </a:rPr>
+              <a:t>而水泵电机属于电感性负载，在水泵启动瞬间，</a:t>
+            </a:r>
+            <a:r>
+              <a:rPr lang="zh-CN" altLang="en-US" u="sng">
+                <a:solidFill>
+                  <a:srgbClr val="FF0000"/>
+                </a:solidFill>
+                <a:sym typeface="+mn-ea"/>
+              </a:rPr>
+              <a:t>启动电涌</a:t>
+            </a:r>
+            <a:r>
+              <a:rPr lang="zh-CN" altLang="en-US">
+                <a:solidFill>
+                  <a:schemeClr val="tx1"/>
+                </a:solidFill>
+                <a:sym typeface="+mn-ea"/>
+              </a:rPr>
+              <a:t>（此时电流大小为正常运行时的</a:t>
+            </a:r>
+            <a:r>
+              <a:rPr lang="en-US" altLang="zh-CN">
+                <a:solidFill>
+                  <a:schemeClr val="tx1"/>
+                </a:solidFill>
+                <a:sym typeface="+mn-ea"/>
+              </a:rPr>
+              <a:t>3~5</a:t>
+            </a:r>
+            <a:r>
+              <a:rPr lang="zh-CN" altLang="en-US">
+                <a:solidFill>
+                  <a:schemeClr val="tx1"/>
+                </a:solidFill>
+                <a:sym typeface="+mn-ea"/>
+              </a:rPr>
+              <a:t>倍），并且还有</a:t>
+            </a:r>
+            <a:r>
+              <a:rPr lang="zh-CN" altLang="en-US" u="sng">
+                <a:solidFill>
+                  <a:srgbClr val="FF0000"/>
+                </a:solidFill>
+                <a:sym typeface="+mn-ea"/>
+              </a:rPr>
+              <a:t>反向电动势</a:t>
+            </a:r>
+            <a:r>
+              <a:rPr lang="zh-CN" altLang="en-US">
+                <a:solidFill>
+                  <a:schemeClr val="tx1"/>
+                </a:solidFill>
+                <a:sym typeface="+mn-ea"/>
+              </a:rPr>
+              <a:t>的</a:t>
+            </a:r>
+            <a:r>
+              <a:rPr lang="zh-CN" altLang="en-US">
+                <a:solidFill>
+                  <a:schemeClr val="tx1"/>
+                </a:solidFill>
+                <a:sym typeface="+mn-ea"/>
+              </a:rPr>
+              <a:t>出现，电机线圈会产生高达几十伏甚至上百伏的反向尖峰电压。</a:t>
+            </a:r>
+            <a:endParaRPr lang="zh-CN" altLang="en-US">
+              <a:solidFill>
+                <a:schemeClr val="tx1"/>
+              </a:solidFill>
+              <a:sym typeface="+mn-ea"/>
+            </a:endParaRPr>
+          </a:p>
+          <a:p>
+            <a:pPr marL="285750" indent="-285750">
+              <a:buFont typeface="Arial" panose="020B0604020202020204" pitchFamily="34" charset="0"/>
+              <a:buChar char="•"/>
+            </a:pPr>
+            <a:r>
+              <a:rPr lang="zh-CN" altLang="en-US">
+                <a:solidFill>
+                  <a:schemeClr val="tx1"/>
+                </a:solidFill>
+                <a:sym typeface="+mn-ea"/>
+              </a:rPr>
+              <a:t>屏幕卡死：</a:t>
+            </a:r>
+            <a:r>
+              <a:rPr lang="en-US" altLang="zh-CN">
+                <a:solidFill>
+                  <a:schemeClr val="tx1"/>
+                </a:solidFill>
+                <a:highlight>
+                  <a:srgbClr val="FFFF00"/>
+                </a:highlight>
+                <a:sym typeface="+mn-ea"/>
+              </a:rPr>
+              <a:t>OLED</a:t>
+            </a:r>
+            <a:r>
+              <a:rPr lang="zh-CN" altLang="en-US">
+                <a:solidFill>
+                  <a:schemeClr val="tx1"/>
+                </a:solidFill>
+                <a:highlight>
+                  <a:srgbClr val="FFFF00"/>
+                </a:highlight>
+                <a:sym typeface="+mn-ea"/>
+              </a:rPr>
+              <a:t>采用的是</a:t>
+            </a:r>
+            <a:r>
+              <a:rPr lang="en-US" altLang="zh-CN">
+                <a:solidFill>
+                  <a:schemeClr val="tx1"/>
+                </a:solidFill>
+                <a:highlight>
+                  <a:srgbClr val="FFFF00"/>
+                </a:highlight>
+                <a:sym typeface="+mn-ea"/>
+              </a:rPr>
+              <a:t>I2C</a:t>
+            </a:r>
+            <a:r>
+              <a:rPr lang="zh-CN" altLang="en-US">
+                <a:solidFill>
+                  <a:schemeClr val="tx1"/>
+                </a:solidFill>
+                <a:highlight>
+                  <a:srgbClr val="FFFF00"/>
+                </a:highlight>
+                <a:sym typeface="+mn-ea"/>
+              </a:rPr>
+              <a:t>通讯，该通讯方式对电磁干扰极为敏感，水泵以及继电器产生的电磁脉冲一旦干扰到</a:t>
+            </a:r>
+            <a:r>
+              <a:rPr lang="en-US" altLang="zh-CN">
+                <a:solidFill>
+                  <a:schemeClr val="tx1"/>
+                </a:solidFill>
+                <a:highlight>
+                  <a:srgbClr val="FFFF00"/>
+                </a:highlight>
+                <a:sym typeface="+mn-ea"/>
+              </a:rPr>
+              <a:t>I2C</a:t>
+            </a:r>
+            <a:r>
+              <a:rPr lang="zh-CN" altLang="en-US">
+                <a:solidFill>
+                  <a:schemeClr val="tx1"/>
+                </a:solidFill>
+                <a:highlight>
+                  <a:srgbClr val="FFFF00"/>
+                </a:highlight>
+                <a:sym typeface="+mn-ea"/>
+              </a:rPr>
+              <a:t>总线，就容易导致底层的</a:t>
+            </a:r>
+            <a:r>
+              <a:rPr lang="en-US" altLang="zh-CN">
+                <a:solidFill>
+                  <a:schemeClr val="tx1"/>
+                </a:solidFill>
+                <a:highlight>
+                  <a:srgbClr val="FFFF00"/>
+                </a:highlight>
+                <a:sym typeface="+mn-ea"/>
+              </a:rPr>
+              <a:t>HAL_I2C_Transmit</a:t>
+            </a:r>
+            <a:r>
+              <a:rPr lang="zh-CN" altLang="en-US">
+                <a:solidFill>
+                  <a:schemeClr val="tx1"/>
+                </a:solidFill>
+                <a:highlight>
+                  <a:srgbClr val="FFFF00"/>
+                </a:highlight>
+                <a:sym typeface="+mn-ea"/>
+              </a:rPr>
+              <a:t>永远卡死在一个</a:t>
+            </a:r>
+            <a:r>
+              <a:rPr lang="en-US" altLang="zh-CN">
+                <a:solidFill>
+                  <a:schemeClr val="tx1"/>
+                </a:solidFill>
+                <a:highlight>
+                  <a:srgbClr val="FFFF00"/>
+                </a:highlight>
+                <a:sym typeface="+mn-ea"/>
+              </a:rPr>
+              <a:t>while</a:t>
+            </a:r>
+            <a:r>
+              <a:rPr lang="zh-CN" altLang="en-US">
+                <a:solidFill>
+                  <a:schemeClr val="tx1"/>
+                </a:solidFill>
+                <a:highlight>
+                  <a:srgbClr val="FFFF00"/>
+                </a:highlight>
+                <a:sym typeface="+mn-ea"/>
+              </a:rPr>
+              <a:t>循环里等应答。此时就会导致其余传感器任务无法正常工作，也没有办法输出数据？</a:t>
+            </a:r>
+            <a:endParaRPr lang="zh-CN" altLang="en-US">
+              <a:solidFill>
+                <a:schemeClr val="tx1"/>
+              </a:solidFill>
+              <a:highlight>
+                <a:srgbClr val="FFFF00"/>
+              </a:highlight>
+              <a:sym typeface="+mn-ea"/>
+            </a:endParaRPr>
+          </a:p>
+        </p:txBody>
+      </p:sp>
+    </p:spTree>
+    <p:custDataLst>
+      <p:tags r:id="rId1"/>
+    </p:custDataLst>
+  </p:cSld>
+  <p:clrMapOvr>
+    <a:masterClrMapping/>
+  </p:clrMapOvr>
+</p:sld>
+</file>
+
+<file path=ppt/slides/slide41.xml><?xml version="1.0" encoding="utf-8"?>
+<p:sld xmlns:a="http://schemas.openxmlformats.org/drawingml/2006/main" xmlns:r="http://schemas.openxmlformats.org/officeDocument/2006/relationships" xmlns:p="http://schemas.openxmlformats.org/presentationml/2006/main">
+  <p:cSld>
+    <p:spTree>
+      <p:nvGrpSpPr>
+        <p:cNvPr id="1" name=""/>
+        <p:cNvGrpSpPr/>
+        <p:nvPr/>
+      </p:nvGrpSpPr>
+      <p:grpSpPr/>
+      <p:sp>
+        <p:nvSpPr>
+          <p:cNvPr id="4" name="文本框 3"/>
+          <p:cNvSpPr txBox="1"/>
+          <p:nvPr/>
+        </p:nvSpPr>
+        <p:spPr>
+          <a:xfrm>
+            <a:off x="364490" y="211455"/>
+            <a:ext cx="11659235" cy="645160"/>
+          </a:xfrm>
+          <a:prstGeom prst="rect">
+            <a:avLst/>
+          </a:prstGeom>
+          <a:noFill/>
+        </p:spPr>
+        <p:txBody>
+          <a:bodyPr wrap="square" rtlCol="0">
+            <a:spAutoFit/>
+          </a:bodyPr>
+          <a:p>
+            <a:r>
+              <a:rPr lang="zh-CN" altLang="en-US"/>
+              <a:t>补充：（更新于</a:t>
+            </a:r>
+            <a:r>
+              <a:rPr lang="en-US" altLang="zh-CN"/>
+              <a:t>2026.07.201)</a:t>
+            </a:r>
+            <a:endParaRPr lang="zh-CN" altLang="en-US"/>
+          </a:p>
+          <a:p>
+            <a:r>
+              <a:rPr lang="en-US" altLang="zh-CN">
+                <a:solidFill>
+                  <a:srgbClr val="FF0000"/>
+                </a:solidFill>
+              </a:rPr>
+              <a:t>Github</a:t>
+            </a:r>
+            <a:r>
+              <a:rPr lang="zh-CN" altLang="en-US">
+                <a:solidFill>
+                  <a:srgbClr val="FF0000"/>
+                </a:solidFill>
+              </a:rPr>
+              <a:t>上传</a:t>
+            </a:r>
+            <a:r>
+              <a:rPr lang="zh-CN" altLang="en-US">
+                <a:solidFill>
+                  <a:srgbClr val="FF0000"/>
+                </a:solidFill>
+              </a:rPr>
+              <a:t>及使用</a:t>
+            </a:r>
+            <a:endParaRPr lang="zh-CN" altLang="en-US">
+              <a:solidFill>
+                <a:srgbClr val="FF0000"/>
+              </a:solidFill>
+            </a:endParaRPr>
+          </a:p>
+        </p:txBody>
+      </p:sp>
+      <p:grpSp>
+        <p:nvGrpSpPr>
+          <p:cNvPr id="10" name="组合 9"/>
+          <p:cNvGrpSpPr/>
+          <p:nvPr/>
+        </p:nvGrpSpPr>
+        <p:grpSpPr>
+          <a:xfrm>
+            <a:off x="364490" y="856615"/>
+            <a:ext cx="11548110" cy="5793740"/>
+            <a:chOff x="602" y="1554"/>
+            <a:chExt cx="18186" cy="9124"/>
+          </a:xfrm>
+        </p:grpSpPr>
+        <p:sp>
+          <p:nvSpPr>
+            <p:cNvPr id="5" name="文本框 4"/>
+            <p:cNvSpPr txBox="1"/>
+            <p:nvPr/>
+          </p:nvSpPr>
+          <p:spPr>
+            <a:xfrm>
+              <a:off x="602" y="1554"/>
+              <a:ext cx="18186" cy="9125"/>
+            </a:xfrm>
+            <a:prstGeom prst="rect">
+              <a:avLst/>
+            </a:prstGeom>
+            <a:noFill/>
+          </p:spPr>
+          <p:txBody>
+            <a:bodyPr wrap="square" rtlCol="0">
+              <a:noAutofit/>
+            </a:bodyPr>
+            <a:p>
+              <a:r>
+                <a:rPr lang="zh-CN" altLang="en-US"/>
+                <a:t>具体内容可以参考：廖雪峰的官方网站</a:t>
+              </a:r>
+              <a:r>
+                <a:rPr lang="en-US" altLang="zh-CN" u="sng"/>
+                <a:t>https://liaoxuefeng.com/books/git/introduction/index.html</a:t>
+              </a:r>
+              <a:endParaRPr lang="en-US" altLang="zh-CN" u="sng"/>
+            </a:p>
+            <a:p>
+              <a:endParaRPr lang="zh-CN" altLang="en-US" u="sng"/>
+            </a:p>
+            <a:p>
+              <a:r>
+                <a:rPr lang="zh-CN" altLang="en-US"/>
+                <a:t>简单来说操作可以分为：</a:t>
+              </a:r>
+              <a:endParaRPr lang="zh-CN" altLang="en-US"/>
+            </a:p>
+            <a:p>
+              <a:r>
+                <a:rPr lang="en-US" altLang="zh-CN"/>
+                <a:t>1</a:t>
+              </a:r>
+              <a:r>
+                <a:rPr lang="zh-CN" altLang="en-US"/>
+                <a:t>、创建版本库</a:t>
+              </a:r>
+              <a:r>
+                <a:rPr lang="en-US" altLang="zh-CN"/>
+                <a:t>  </a:t>
+              </a:r>
+              <a:r>
+                <a:rPr lang="en-US" altLang="zh-CN" u="sng">
+                  <a:solidFill>
+                    <a:srgbClr val="FF0000"/>
+                  </a:solidFill>
+                </a:rPr>
+                <a:t>git init</a:t>
+              </a:r>
+              <a:r>
+                <a:rPr lang="zh-CN" altLang="en-US"/>
+                <a:t>（使用</a:t>
+              </a:r>
+              <a:r>
+                <a:rPr lang="en-US" altLang="zh-CN"/>
+                <a:t> Windows powershell</a:t>
+              </a:r>
+              <a:r>
+                <a:rPr lang="zh-CN" altLang="en-US"/>
+                <a:t>进入你需要上传文件包的</a:t>
+              </a:r>
+              <a:r>
+                <a:rPr lang="zh-CN" altLang="en-US"/>
+                <a:t>地址）</a:t>
+              </a:r>
+              <a:endParaRPr lang="zh-CN" altLang="en-US"/>
+            </a:p>
+            <a:p>
+              <a:endParaRPr lang="zh-CN" altLang="en-US"/>
+            </a:p>
+            <a:p>
+              <a:endParaRPr lang="zh-CN" altLang="en-US"/>
+            </a:p>
+            <a:p>
+              <a:endParaRPr lang="zh-CN" altLang="en-US"/>
+            </a:p>
+            <a:p>
+              <a:r>
+                <a:rPr lang="en-US" altLang="zh-CN"/>
+                <a:t>2</a:t>
+              </a:r>
+              <a:r>
+                <a:rPr lang="zh-CN" altLang="en-US"/>
+                <a:t>、将需要上传的文件依次进行</a:t>
+              </a:r>
+              <a:r>
+                <a:rPr lang="en-US" altLang="zh-CN"/>
+                <a:t>  </a:t>
+              </a:r>
+              <a:r>
+                <a:rPr lang="en-US" altLang="zh-CN" u="sng">
+                  <a:solidFill>
+                    <a:srgbClr val="FF0000"/>
+                  </a:solidFill>
+                </a:rPr>
+                <a:t>git add</a:t>
+              </a:r>
+              <a:r>
+                <a:rPr lang="zh-CN" altLang="en-US" u="sng">
+                  <a:solidFill>
+                    <a:srgbClr val="FF0000"/>
+                  </a:solidFill>
+                </a:rPr>
+                <a:t>（文件添加到库）</a:t>
+              </a:r>
+              <a:r>
+                <a:rPr lang="en-US" altLang="zh-CN"/>
+                <a:t>  </a:t>
+              </a:r>
+              <a:r>
+                <a:rPr lang="zh-CN" altLang="en-US"/>
+                <a:t>操作以及</a:t>
+              </a:r>
+              <a:r>
+                <a:rPr lang="en-US" altLang="zh-CN"/>
+                <a:t>  </a:t>
+              </a:r>
+              <a:r>
+                <a:rPr lang="en-US" altLang="zh-CN" u="sng">
+                  <a:solidFill>
+                    <a:srgbClr val="FF0000"/>
+                  </a:solidFill>
+                </a:rPr>
+                <a:t>git commit</a:t>
+              </a:r>
+              <a:r>
+                <a:rPr lang="zh-CN" altLang="en-US" u="sng">
+                  <a:solidFill>
+                    <a:srgbClr val="FF0000"/>
+                  </a:solidFill>
+                </a:rPr>
+                <a:t>（文件提交到</a:t>
+              </a:r>
+              <a:r>
+                <a:rPr lang="zh-CN" altLang="en-US" u="sng">
+                  <a:solidFill>
+                    <a:srgbClr val="FF0000"/>
+                  </a:solidFill>
+                </a:rPr>
+                <a:t>仓库）</a:t>
+              </a:r>
+              <a:r>
+                <a:rPr lang="en-US" altLang="zh-CN"/>
+                <a:t>  </a:t>
+              </a:r>
+              <a:r>
+                <a:rPr lang="zh-CN" altLang="en-US"/>
+                <a:t>操作</a:t>
+              </a:r>
+              <a:endParaRPr lang="zh-CN" altLang="en-US"/>
+            </a:p>
+            <a:p>
+              <a:endParaRPr lang="zh-CN" altLang="en-US"/>
+            </a:p>
+            <a:p>
+              <a:endParaRPr lang="zh-CN" altLang="en-US"/>
+            </a:p>
+            <a:p>
+              <a:endParaRPr lang="zh-CN" altLang="en-US"/>
+            </a:p>
+            <a:p>
+              <a:endParaRPr lang="zh-CN" altLang="en-US"/>
+            </a:p>
+            <a:p>
+              <a:endParaRPr lang="zh-CN" altLang="en-US"/>
+            </a:p>
+            <a:p>
+              <a:endParaRPr lang="zh-CN" altLang="en-US"/>
+            </a:p>
+            <a:p>
+              <a:endParaRPr lang="zh-CN" altLang="en-US"/>
+            </a:p>
+            <a:p>
+              <a:r>
+                <a:rPr lang="en-US" altLang="zh-CN"/>
+                <a:t>3</a:t>
+              </a:r>
+              <a:r>
+                <a:rPr lang="zh-CN" altLang="en-US"/>
+                <a:t>、新建</a:t>
+              </a:r>
+              <a:r>
+                <a:rPr lang="en-US" altLang="zh-CN"/>
+                <a:t>githuub</a:t>
+              </a:r>
+              <a:r>
+                <a:rPr lang="zh-CN" altLang="en-US"/>
+                <a:t>仓库，将</a:t>
+              </a:r>
+              <a:r>
+                <a:rPr lang="en-US" altLang="zh-CN"/>
+                <a:t>Github</a:t>
+              </a:r>
+              <a:r>
+                <a:rPr lang="zh-CN" altLang="en-US"/>
+                <a:t>仓库和本地仓库关联（后续步骤</a:t>
+              </a:r>
+              <a:r>
+                <a:rPr lang="en-US" altLang="zh-CN"/>
+                <a:t>github</a:t>
+              </a:r>
+              <a:r>
+                <a:rPr lang="zh-CN" altLang="en-US"/>
+                <a:t>上已有</a:t>
+              </a:r>
+              <a:r>
+                <a:rPr lang="zh-CN" altLang="en-US"/>
+                <a:t>教程）</a:t>
+              </a:r>
+              <a:endParaRPr lang="zh-CN" altLang="en-US"/>
+            </a:p>
+            <a:p>
+              <a:endParaRPr lang="zh-CN" altLang="en-US"/>
+            </a:p>
+            <a:p>
+              <a:endParaRPr lang="zh-CN" altLang="en-US"/>
+            </a:p>
+            <a:p>
+              <a:r>
+                <a:rPr lang="en-US" altLang="zh-CN">
+                  <a:sym typeface="+mn-ea"/>
+                </a:rPr>
+                <a:t>4</a:t>
+              </a:r>
+              <a:r>
+                <a:rPr lang="zh-CN" altLang="en-US">
+                  <a:sym typeface="+mn-ea"/>
+                </a:rPr>
+                <a:t>、将本地库的所有内容都推送到</a:t>
+              </a:r>
+              <a:r>
+                <a:rPr lang="zh-CN" altLang="en-US">
+                  <a:sym typeface="+mn-ea"/>
+                </a:rPr>
+                <a:t>远程库</a:t>
+              </a:r>
+              <a:endParaRPr lang="zh-CN" altLang="en-US"/>
+            </a:p>
+            <a:p>
+              <a:endParaRPr lang="zh-CN" altLang="en-US"/>
+            </a:p>
+            <a:p>
+              <a:endParaRPr lang="zh-CN" altLang="en-US"/>
+            </a:p>
+            <a:p>
+              <a:endParaRPr lang="zh-CN" altLang="en-US"/>
+            </a:p>
+            <a:p>
+              <a:endParaRPr lang="zh-CN" altLang="en-US"/>
+            </a:p>
+          </p:txBody>
+        </p:sp>
+        <p:pic>
+          <p:nvPicPr>
+            <p:cNvPr id="2" name="图片 1"/>
+            <p:cNvPicPr>
+              <a:picLocks noChangeAspect="1"/>
+            </p:cNvPicPr>
+            <p:nvPr/>
+          </p:nvPicPr>
+          <p:blipFill>
+            <a:blip r:embed="rId1"/>
+            <a:srcRect t="39718"/>
+            <a:stretch>
+              <a:fillRect/>
+            </a:stretch>
+          </p:blipFill>
+          <p:spPr>
+            <a:xfrm>
+              <a:off x="1241" y="3461"/>
+              <a:ext cx="13184" cy="1111"/>
+            </a:xfrm>
+            <a:prstGeom prst="rect">
+              <a:avLst/>
+            </a:prstGeom>
+          </p:spPr>
+        </p:pic>
+        <p:pic>
+          <p:nvPicPr>
+            <p:cNvPr id="3" name="图片 2"/>
+            <p:cNvPicPr>
+              <a:picLocks noChangeAspect="1"/>
+            </p:cNvPicPr>
+            <p:nvPr/>
+          </p:nvPicPr>
+          <p:blipFill>
+            <a:blip r:embed="rId2"/>
+            <a:stretch>
+              <a:fillRect/>
+            </a:stretch>
+          </p:blipFill>
+          <p:spPr>
+            <a:xfrm>
+              <a:off x="1241" y="5211"/>
+              <a:ext cx="13184" cy="739"/>
+            </a:xfrm>
+            <a:prstGeom prst="rect">
+              <a:avLst/>
+            </a:prstGeom>
+          </p:spPr>
+        </p:pic>
+        <p:pic>
+          <p:nvPicPr>
+            <p:cNvPr id="6" name="图片 5"/>
+            <p:cNvPicPr>
+              <a:picLocks noChangeAspect="1"/>
+            </p:cNvPicPr>
+            <p:nvPr/>
+          </p:nvPicPr>
+          <p:blipFill>
+            <a:blip r:embed="rId3"/>
+            <a:stretch>
+              <a:fillRect/>
+            </a:stretch>
+          </p:blipFill>
+          <p:spPr>
+            <a:xfrm>
+              <a:off x="1241" y="5950"/>
+              <a:ext cx="13183" cy="1958"/>
+            </a:xfrm>
+            <a:prstGeom prst="rect">
+              <a:avLst/>
+            </a:prstGeom>
+          </p:spPr>
+        </p:pic>
+        <p:pic>
+          <p:nvPicPr>
+            <p:cNvPr id="7" name="图片 6"/>
+            <p:cNvPicPr>
+              <a:picLocks noChangeAspect="1"/>
+            </p:cNvPicPr>
+            <p:nvPr/>
+          </p:nvPicPr>
+          <p:blipFill>
+            <a:blip r:embed="rId4"/>
+            <a:stretch>
+              <a:fillRect/>
+            </a:stretch>
+          </p:blipFill>
+          <p:spPr>
+            <a:xfrm>
+              <a:off x="1241" y="8578"/>
+              <a:ext cx="13184" cy="754"/>
+            </a:xfrm>
+            <a:prstGeom prst="rect">
+              <a:avLst/>
+            </a:prstGeom>
+          </p:spPr>
+        </p:pic>
+        <p:sp>
+          <p:nvSpPr>
+            <p:cNvPr id="8" name="文本框 7"/>
+            <p:cNvSpPr txBox="1"/>
+            <p:nvPr/>
+          </p:nvSpPr>
+          <p:spPr>
+            <a:xfrm>
+              <a:off x="5475" y="8714"/>
+              <a:ext cx="5650" cy="483"/>
+            </a:xfrm>
+            <a:prstGeom prst="rect">
+              <a:avLst/>
+            </a:prstGeom>
+            <a:solidFill>
+              <a:srgbClr val="C00000"/>
+            </a:solidFill>
+          </p:spPr>
+          <p:txBody>
+            <a:bodyPr wrap="square" rtlCol="0">
+              <a:spAutoFit/>
+            </a:bodyPr>
+            <a:p>
+              <a:pPr algn="ctr"/>
+              <a:r>
+                <a:rPr lang="zh-CN" altLang="en-US" sz="1400"/>
+                <a:t>自己的</a:t>
+              </a:r>
+              <a:r>
+                <a:rPr lang="en-US" altLang="zh-CN" sz="1400"/>
+                <a:t>github</a:t>
+              </a:r>
+              <a:r>
+                <a:rPr lang="zh-CN" altLang="en-US" sz="1400"/>
+                <a:t>账户</a:t>
+              </a:r>
+              <a:endParaRPr lang="zh-CN" altLang="en-US" sz="1400"/>
+            </a:p>
+          </p:txBody>
+        </p:sp>
+        <p:pic>
+          <p:nvPicPr>
+            <p:cNvPr id="9" name="图片 8"/>
+            <p:cNvPicPr>
+              <a:picLocks noChangeAspect="1"/>
+            </p:cNvPicPr>
+            <p:nvPr/>
+          </p:nvPicPr>
+          <p:blipFill>
+            <a:blip r:embed="rId5"/>
+            <a:stretch>
+              <a:fillRect/>
+            </a:stretch>
+          </p:blipFill>
+          <p:spPr>
+            <a:xfrm>
+              <a:off x="1242" y="9872"/>
+              <a:ext cx="13183" cy="692"/>
+            </a:xfrm>
+            <a:prstGeom prst="rect">
+              <a:avLst/>
+            </a:prstGeom>
+          </p:spPr>
+        </p:pic>
+      </p:grpSp>
+    </p:spTree>
+    <p:custDataLst>
+      <p:tags r:id="rId6"/>
     </p:custDataLst>
   </p:cSld>
   <p:clrMapOvr>
@@ -28315,7 +29626,19 @@
 
 <file path=ppt/tags/tag178.xml><?xml version="1.0" encoding="utf-8"?>
 <p:tagLst xmlns:p="http://schemas.openxmlformats.org/presentationml/2006/main">
-  <p:tag name="resource_record_key" val="{&quot;10&quot;:[50059375,50059516,50059483,50059450,50062355],&quot;29&quot;:[50053160,50000199],&quot;65&quot;:[20205081]}"/>
+  <p:tag name="KSO_WM_BEAUTIFY_FLAG" val="#wm#"/>
+  <p:tag name="KSO_WM_TEMPLATE_CATEGORY" val="custom"/>
+  <p:tag name="KSO_WM_TEMPLATE_INDEX" val="20205081"/>
+  <p:tag name="resource_record_key" val="{&quot;29&quot;:[50053160,50000199],&quot;65&quot;:[20205081]}"/>
+</p:tagLst>
+</file>
+
+<file path=ppt/tags/tag179.xml><?xml version="1.0" encoding="utf-8"?>
+<p:tagLst xmlns:p="http://schemas.openxmlformats.org/presentationml/2006/main">
+  <p:tag name="KSO_WM_BEAUTIFY_FLAG" val="#wm#"/>
+  <p:tag name="KSO_WM_TEMPLATE_CATEGORY" val="custom"/>
+  <p:tag name="KSO_WM_TEMPLATE_INDEX" val="20205081"/>
+  <p:tag name="resource_record_key" val="{&quot;29&quot;:[50053160,50000199],&quot;65&quot;:[20205081]}"/>
 </p:tagLst>
 </file>
 
@@ -28329,6 +29652,12 @@
   <p:tag name="KSO_WM_UNIT_LAYERLEVEL" val="1"/>
   <p:tag name="KSO_WM_TAG_VERSION" val="1.0"/>
   <p:tag name="KSO_WM_BEAUTIFY_FLAG" val="#wm#"/>
+</p:tagLst>
+</file>
+
+<file path=ppt/tags/tag180.xml><?xml version="1.0" encoding="utf-8"?>
+<p:tagLst xmlns:p="http://schemas.openxmlformats.org/presentationml/2006/main">
+  <p:tag name="resource_record_key" val="{&quot;10&quot;:[50059375,50059516,50059483,50059450,50062355],&quot;29&quot;:[50053160,50000199],&quot;65&quot;:[20205081]}"/>
 </p:tagLst>
 </file>
 
